--- a/generated/Tier 1 Broker Scorecards/Your Truck Shield LLC_Broker_Scorecard.pptx
+++ b/generated/Tier 1 Broker Scorecards/Your Truck Shield LLC_Broker_Scorecard.pptx
@@ -3357,7 +3357,7 @@
                         <a:rPr sz="800">
                           <a:latin typeface="Segoe UI"/>
                         </a:rPr>
-                        <a:t>$2,306,596.93 / $2,629,759.68 / $1,091,706.75</a:t>
+                        <a:t>$2,306,596.93 / $2,626,936.02 / $1,088,883.09</a:t>
                       </a:r>
                     </a:p>
                   </a:txBody>
@@ -3394,7 +3394,7 @@
                         <a:rPr sz="900">
                           <a:latin typeface="Segoe UI"/>
                         </a:rPr>
-                        <a:t>Tier 1  |  10.71% / 15.00%</a:t>
+                        <a:t>Tier 1  |  10.89% / 15.00%</a:t>
                       </a:r>
                     </a:p>
                   </a:txBody>
@@ -3431,7 +3431,7 @@
                         <a:rPr sz="900">
                           <a:latin typeface="Segoe UI"/>
                         </a:rPr>
-                        <a:t>$3,229,235.70  (33.8% achieved)</a:t>
+                        <a:t>$3,229,235.70  (33.7% achieved)</a:t>
                       </a:r>
                     </a:p>
                   </a:txBody>
@@ -3690,7 +3690,7 @@
                         <a:rPr sz="900">
                           <a:latin typeface="Segoe UI"/>
                         </a:rPr>
-                        <a:t>Fleet Bound Premium: $140,415.96</a:t>
+                        <a:t>Fleet Bound Premium: $138,650.07</a:t>
                       </a:r>
                     </a:p>
                   </a:txBody>
@@ -3727,7 +3727,7 @@
                         <a:rPr sz="900">
                           <a:latin typeface="Segoe UI"/>
                         </a:rPr>
-                        <a:t>Fleet Book %: 12.9%</a:t>
+                        <a:t>Fleet Book %: 12.7%</a:t>
                       </a:r>
                     </a:p>
                   </a:txBody>
@@ -3766,7 +3766,7 @@
                         <a:rPr sz="900">
                           <a:latin typeface="Segoe UI"/>
                         </a:rPr>
-                        <a:t>Non-Fleet Subs: 471  |  Binds: 51</a:t>
+                        <a:t>Non-Fleet Subs: 472  |  Binds: 52</a:t>
                       </a:r>
                     </a:p>
                   </a:txBody>
@@ -3803,7 +3803,7 @@
                         <a:rPr sz="900">
                           <a:latin typeface="Segoe UI"/>
                         </a:rPr>
-                        <a:t>Non-Fleet Bound Premium: $951,290.79</a:t>
+                        <a:t>Non-Fleet Bound Premium: $950,233.02</a:t>
                       </a:r>
                     </a:p>
                   </a:txBody>
@@ -3840,7 +3840,7 @@
                         <a:rPr sz="900">
                           <a:latin typeface="Segoe UI"/>
                         </a:rPr>
-                        <a:t>Non-Fleet Book %: 87.1%</a:t>
+                        <a:t>Non-Fleet Book %: 87.3%</a:t>
                       </a:r>
                     </a:p>
                   </a:txBody>
@@ -4428,7 +4428,7 @@
                           </a:solidFill>
                           <a:latin typeface="Segoe UI"/>
                         </a:rPr>
-                        <a:t>47</a:t>
+                        <a:t>49</a:t>
                       </a:r>
                     </a:p>
                   </a:txBody>
@@ -4707,7 +4707,7 @@
                           </a:solidFill>
                           <a:latin typeface="Segoe UI"/>
                         </a:rPr>
-                        <a:t>25.5%</a:t>
+                        <a:t>26.5%</a:t>
                       </a:r>
                     </a:p>
                   </a:txBody>
@@ -4983,7 +4983,7 @@
                           </a:solidFill>
                           <a:latin typeface="Segoe UI"/>
                         </a:rPr>
-                        <a:t>12</a:t>
+                        <a:t>13</a:t>
                       </a:r>
                     </a:p>
                   </a:txBody>
@@ -5262,7 +5262,7 @@
                           </a:solidFill>
                           <a:latin typeface="Segoe UI"/>
                         </a:rPr>
-                        <a:t>$84.6K</a:t>
+                        <a:t>$81.8K</a:t>
                       </a:r>
                     </a:p>
                   </a:txBody>

--- a/generated/Tier 1 Broker Scorecards/Your Truck Shield LLC_Broker_Scorecard.pptx
+++ b/generated/Tier 1 Broker Scorecards/Your Truck Shield LLC_Broker_Scorecard.pptx
@@ -3394,7 +3394,7 @@
                         <a:rPr sz="900">
                           <a:latin typeface="Segoe UI"/>
                         </a:rPr>
-                        <a:t>Tier 1  |  10.89% / 15.00%</a:t>
+                        <a:t>Tier 1  |  10.87% / 15.00%</a:t>
                       </a:r>
                     </a:p>
                   </a:txBody>
@@ -3690,7 +3690,7 @@
                         <a:rPr sz="900">
                           <a:latin typeface="Segoe UI"/>
                         </a:rPr>
-                        <a:t>Fleet Bound Premium: $138,650.07</a:t>
+                        <a:t>Fleet Bound Premium: $111,742.72</a:t>
                       </a:r>
                     </a:p>
                   </a:txBody>
@@ -3727,7 +3727,7 @@
                         <a:rPr sz="900">
                           <a:latin typeface="Segoe UI"/>
                         </a:rPr>
-                        <a:t>Fleet Book %: 12.7%</a:t>
+                        <a:t>Fleet Book %: 10.3%</a:t>
                       </a:r>
                     </a:p>
                   </a:txBody>
@@ -3766,7 +3766,7 @@
                         <a:rPr sz="900">
                           <a:latin typeface="Segoe UI"/>
                         </a:rPr>
-                        <a:t>Non-Fleet Subs: 472  |  Binds: 52</a:t>
+                        <a:t>Non-Fleet Subs: 473  |  Binds: 52</a:t>
                       </a:r>
                     </a:p>
                   </a:txBody>
@@ -3803,7 +3803,7 @@
                         <a:rPr sz="900">
                           <a:latin typeface="Segoe UI"/>
                         </a:rPr>
-                        <a:t>Non-Fleet Bound Premium: $950,233.02</a:t>
+                        <a:t>Non-Fleet Bound Premium: $977,140.37</a:t>
                       </a:r>
                     </a:p>
                   </a:txBody>
@@ -3840,7 +3840,7 @@
                         <a:rPr sz="900">
                           <a:latin typeface="Segoe UI"/>
                         </a:rPr>
-                        <a:t>Non-Fleet Book %: 87.3%</a:t>
+                        <a:t>Non-Fleet Book %: 89.7%</a:t>
                       </a:r>
                     </a:p>
                   </a:txBody>
@@ -4428,7 +4428,7 @@
                           </a:solidFill>
                           <a:latin typeface="Segoe UI"/>
                         </a:rPr>
-                        <a:t>49</a:t>
+                        <a:t>51</a:t>
                       </a:r>
                     </a:p>
                   </a:txBody>
@@ -4707,7 +4707,7 @@
                           </a:solidFill>
                           <a:latin typeface="Segoe UI"/>
                         </a:rPr>
-                        <a:t>26.5%</a:t>
+                        <a:t>25.5%</a:t>
                       </a:r>
                     </a:p>
                   </a:txBody>

--- a/generated/Tier 1 Broker Scorecards/Your Truck Shield LLC_Broker_Scorecard.pptx
+++ b/generated/Tier 1 Broker Scorecards/Your Truck Shield LLC_Broker_Scorecard.pptx
@@ -3394,7 +3394,7 @@
                         <a:rPr sz="900">
                           <a:latin typeface="Segoe UI"/>
                         </a:rPr>
-                        <a:t>Tier 1  |  10.87% / 15.00%</a:t>
+                        <a:t>Tier 1  |  10.44% / 15.00%</a:t>
                       </a:r>
                     </a:p>
                   </a:txBody>
@@ -3690,7 +3690,7 @@
                         <a:rPr sz="900">
                           <a:latin typeface="Segoe UI"/>
                         </a:rPr>
-                        <a:t>Fleet Bound Premium: $111,742.72</a:t>
+                        <a:t>Fleet Bound Premium: $114,899.95</a:t>
                       </a:r>
                     </a:p>
                   </a:txBody>
@@ -3727,7 +3727,7 @@
                         <a:rPr sz="900">
                           <a:latin typeface="Segoe UI"/>
                         </a:rPr>
-                        <a:t>Fleet Book %: 10.3%</a:t>
+                        <a:t>Fleet Book %: 10.6%</a:t>
                       </a:r>
                     </a:p>
                   </a:txBody>
@@ -3766,7 +3766,7 @@
                         <a:rPr sz="900">
                           <a:latin typeface="Segoe UI"/>
                         </a:rPr>
-                        <a:t>Non-Fleet Subs: 473  |  Binds: 52</a:t>
+                        <a:t>Non-Fleet Subs: 474  |  Binds: 50</a:t>
                       </a:r>
                     </a:p>
                   </a:txBody>
@@ -3803,7 +3803,7 @@
                         <a:rPr sz="900">
                           <a:latin typeface="Segoe UI"/>
                         </a:rPr>
-                        <a:t>Non-Fleet Bound Premium: $977,140.37</a:t>
+                        <a:t>Non-Fleet Bound Premium: $973,983.14</a:t>
                       </a:r>
                     </a:p>
                   </a:txBody>
@@ -3840,7 +3840,7 @@
                         <a:rPr sz="900">
                           <a:latin typeface="Segoe UI"/>
                         </a:rPr>
-                        <a:t>Non-Fleet Book %: 89.7%</a:t>
+                        <a:t>Non-Fleet Book %: 89.4%</a:t>
                       </a:r>
                     </a:p>
                   </a:txBody>
@@ -4428,7 +4428,7 @@
                           </a:solidFill>
                           <a:latin typeface="Segoe UI"/>
                         </a:rPr>
-                        <a:t>51</a:t>
+                        <a:t>55</a:t>
                       </a:r>
                     </a:p>
                   </a:txBody>
@@ -4624,7 +4624,7 @@
                           </a:solidFill>
                           <a:latin typeface="Segoe UI"/>
                         </a:rPr>
-                        <a:t>18.8%</a:t>
+                        <a:t>19.5%</a:t>
                       </a:r>
                     </a:p>
                   </a:txBody>
@@ -4707,7 +4707,7 @@
                           </a:solidFill>
                           <a:latin typeface="Segoe UI"/>
                         </a:rPr>
-                        <a:t>25.5%</a:t>
+                        <a:t>23.6%</a:t>
                       </a:r>
                     </a:p>
                   </a:txBody>
@@ -4906,7 +4906,7 @@
                           </a:solidFill>
                           <a:latin typeface="Segoe UI"/>
                         </a:rPr>
-                        <a:t>24</a:t>
+                        <a:t>25</a:t>
                       </a:r>
                     </a:p>
                   </a:txBody>

--- a/generated/Tier 1 Broker Scorecards/Your Truck Shield LLC_Broker_Scorecard.pptx
+++ b/generated/Tier 1 Broker Scorecards/Your Truck Shield LLC_Broker_Scorecard.pptx
@@ -3394,7 +3394,7 @@
                         <a:rPr sz="900">
                           <a:latin typeface="Segoe UI"/>
                         </a:rPr>
-                        <a:t>Tier 1  |  10.44% / 15.00%</a:t>
+                        <a:t>Tier 1  |  10.22% / 15.00%</a:t>
                       </a:r>
                     </a:p>
                   </a:txBody>
@@ -3690,7 +3690,7 @@
                         <a:rPr sz="900">
                           <a:latin typeface="Segoe UI"/>
                         </a:rPr>
-                        <a:t>Fleet Bound Premium: $114,899.95</a:t>
+                        <a:t>Fleet Bound Premium: $114,885.74</a:t>
                       </a:r>
                     </a:p>
                   </a:txBody>
@@ -3766,7 +3766,7 @@
                         <a:rPr sz="900">
                           <a:latin typeface="Segoe UI"/>
                         </a:rPr>
-                        <a:t>Non-Fleet Subs: 474  |  Binds: 50</a:t>
+                        <a:t>Non-Fleet Subs: 475  |  Binds: 49</a:t>
                       </a:r>
                     </a:p>
                   </a:txBody>
@@ -3803,7 +3803,7 @@
                         <a:rPr sz="900">
                           <a:latin typeface="Segoe UI"/>
                         </a:rPr>
-                        <a:t>Non-Fleet Bound Premium: $973,983.14</a:t>
+                        <a:t>Non-Fleet Bound Premium: $973,997.35</a:t>
                       </a:r>
                     </a:p>
                   </a:txBody>
@@ -4428,7 +4428,7 @@
                           </a:solidFill>
                           <a:latin typeface="Segoe UI"/>
                         </a:rPr>
-                        <a:t>55</a:t>
+                        <a:t>58</a:t>
                       </a:r>
                     </a:p>
                   </a:txBody>
@@ -4707,7 +4707,7 @@
                           </a:solidFill>
                           <a:latin typeface="Segoe UI"/>
                         </a:rPr>
-                        <a:t>23.6%</a:t>
+                        <a:t>22.4%</a:t>
                       </a:r>
                     </a:p>
                   </a:txBody>

--- a/generated/Tier 1 Broker Scorecards/Your Truck Shield LLC_Broker_Scorecard.pptx
+++ b/generated/Tier 1 Broker Scorecards/Your Truck Shield LLC_Broker_Scorecard.pptx
@@ -3394,7 +3394,7 @@
                         <a:rPr sz="900">
                           <a:latin typeface="Segoe UI"/>
                         </a:rPr>
-                        <a:t>Tier 1  |  10.22% / 15.00%</a:t>
+                        <a:t>Tier 1  |  10.40% / 15.00%</a:t>
                       </a:r>
                     </a:p>
                   </a:txBody>
@@ -3690,7 +3690,7 @@
                         <a:rPr sz="900">
                           <a:latin typeface="Segoe UI"/>
                         </a:rPr>
-                        <a:t>Fleet Bound Premium: $114,885.74</a:t>
+                        <a:t>Fleet Bound Premium: $114,948.86</a:t>
                       </a:r>
                     </a:p>
                   </a:txBody>
@@ -3766,7 +3766,7 @@
                         <a:rPr sz="900">
                           <a:latin typeface="Segoe UI"/>
                         </a:rPr>
-                        <a:t>Non-Fleet Subs: 475  |  Binds: 49</a:t>
+                        <a:t>Non-Fleet Subs: 476  |  Binds: 50</a:t>
                       </a:r>
                     </a:p>
                   </a:txBody>
@@ -3803,7 +3803,7 @@
                         <a:rPr sz="900">
                           <a:latin typeface="Segoe UI"/>
                         </a:rPr>
-                        <a:t>Non-Fleet Bound Premium: $973,997.35</a:t>
+                        <a:t>Non-Fleet Bound Premium: $973,934.23</a:t>
                       </a:r>
                     </a:p>
                   </a:txBody>
@@ -4428,7 +4428,7 @@
                           </a:solidFill>
                           <a:latin typeface="Segoe UI"/>
                         </a:rPr>
-                        <a:t>58</a:t>
+                        <a:t>59</a:t>
                       </a:r>
                     </a:p>
                   </a:txBody>
@@ -4707,7 +4707,7 @@
                           </a:solidFill>
                           <a:latin typeface="Segoe UI"/>
                         </a:rPr>
-                        <a:t>22.4%</a:t>
+                        <a:t>22.0%</a:t>
                       </a:r>
                     </a:p>
                   </a:txBody>

--- a/generated/Tier 1 Broker Scorecards/Your Truck Shield LLC_Broker_Scorecard.pptx
+++ b/generated/Tier 1 Broker Scorecards/Your Truck Shield LLC_Broker_Scorecard.pptx
@@ -3690,7 +3690,7 @@
                         <a:rPr sz="900">
                           <a:latin typeface="Segoe UI"/>
                         </a:rPr>
-                        <a:t>Fleet Bound Premium: $114,948.86</a:t>
+                        <a:t>Fleet Bound Premium: $114,823.58</a:t>
                       </a:r>
                     </a:p>
                   </a:txBody>
@@ -3727,7 +3727,7 @@
                         <a:rPr sz="900">
                           <a:latin typeface="Segoe UI"/>
                         </a:rPr>
-                        <a:t>Fleet Book %: 10.6%</a:t>
+                        <a:t>Fleet Book %: 10.5%</a:t>
                       </a:r>
                     </a:p>
                   </a:txBody>
@@ -3803,7 +3803,7 @@
                         <a:rPr sz="900">
                           <a:latin typeface="Segoe UI"/>
                         </a:rPr>
-                        <a:t>Non-Fleet Bound Premium: $973,934.23</a:t>
+                        <a:t>Non-Fleet Bound Premium: $974,059.51</a:t>
                       </a:r>
                     </a:p>
                   </a:txBody>
@@ -3840,7 +3840,7 @@
                         <a:rPr sz="900">
                           <a:latin typeface="Segoe UI"/>
                         </a:rPr>
-                        <a:t>Non-Fleet Book %: 89.4%</a:t>
+                        <a:t>Non-Fleet Book %: 89.5%</a:t>
                       </a:r>
                     </a:p>
                   </a:txBody>

--- a/generated/Tier 1 Broker Scorecards/Your Truck Shield LLC_Broker_Scorecard.pptx
+++ b/generated/Tier 1 Broker Scorecards/Your Truck Shield LLC_Broker_Scorecard.pptx
@@ -3394,7 +3394,7 @@
                         <a:rPr sz="900">
                           <a:latin typeface="Segoe UI"/>
                         </a:rPr>
-                        <a:t>Tier 1  |  10.40% / 15.00%</a:t>
+                        <a:t>Tier 1  |  10.38% / 15.00%</a:t>
                       </a:r>
                     </a:p>
                   </a:txBody>
@@ -3690,7 +3690,7 @@
                         <a:rPr sz="900">
                           <a:latin typeface="Segoe UI"/>
                         </a:rPr>
-                        <a:t>Fleet Bound Premium: $114,823.58</a:t>
+                        <a:t>Fleet Bound Premium: $114,948.86</a:t>
                       </a:r>
                     </a:p>
                   </a:txBody>
@@ -3727,7 +3727,7 @@
                         <a:rPr sz="900">
                           <a:latin typeface="Segoe UI"/>
                         </a:rPr>
-                        <a:t>Fleet Book %: 10.5%</a:t>
+                        <a:t>Fleet Book %: 10.6%</a:t>
                       </a:r>
                     </a:p>
                   </a:txBody>
@@ -3766,7 +3766,7 @@
                         <a:rPr sz="900">
                           <a:latin typeface="Segoe UI"/>
                         </a:rPr>
-                        <a:t>Non-Fleet Subs: 476  |  Binds: 50</a:t>
+                        <a:t>Non-Fleet Subs: 477  |  Binds: 50</a:t>
                       </a:r>
                     </a:p>
                   </a:txBody>
@@ -3803,7 +3803,7 @@
                         <a:rPr sz="900">
                           <a:latin typeface="Segoe UI"/>
                         </a:rPr>
-                        <a:t>Non-Fleet Bound Premium: $974,059.51</a:t>
+                        <a:t>Non-Fleet Bound Premium: $973,934.23</a:t>
                       </a:r>
                     </a:p>
                   </a:txBody>
@@ -3840,7 +3840,7 @@
                         <a:rPr sz="900">
                           <a:latin typeface="Segoe UI"/>
                         </a:rPr>
-                        <a:t>Non-Fleet Book %: 89.5%</a:t>
+                        <a:t>Non-Fleet Book %: 89.4%</a:t>
                       </a:r>
                     </a:p>
                   </a:txBody>
@@ -4428,7 +4428,7 @@
                           </a:solidFill>
                           <a:latin typeface="Segoe UI"/>
                         </a:rPr>
-                        <a:t>59</a:t>
+                        <a:t>60</a:t>
                       </a:r>
                     </a:p>
                   </a:txBody>
@@ -4707,7 +4707,7 @@
                           </a:solidFill>
                           <a:latin typeface="Segoe UI"/>
                         </a:rPr>
-                        <a:t>22.0%</a:t>
+                        <a:t>21.7%</a:t>
                       </a:r>
                     </a:p>
                   </a:txBody>

--- a/generated/Tier 1 Broker Scorecards/Your Truck Shield LLC_Broker_Scorecard.pptx
+++ b/generated/Tier 1 Broker Scorecards/Your Truck Shield LLC_Broker_Scorecard.pptx
@@ -3357,7 +3357,7 @@
                         <a:rPr sz="800">
                           <a:latin typeface="Segoe UI"/>
                         </a:rPr>
-                        <a:t>$2,306,596.93 / $2,626,936.02 / $1,088,883.09</a:t>
+                        <a:t>$2,306,596.93 / $2,627,130.04 / $1,089,077.11</a:t>
                       </a:r>
                     </a:p>
                   </a:txBody>
@@ -3394,7 +3394,7 @@
                         <a:rPr sz="900">
                           <a:latin typeface="Segoe UI"/>
                         </a:rPr>
-                        <a:t>Tier 1  |  10.38% / 15.00%</a:t>
+                        <a:t>Tier 1  |  10.58% / 15.00%</a:t>
                       </a:r>
                     </a:p>
                   </a:txBody>
@@ -3690,7 +3690,7 @@
                         <a:rPr sz="900">
                           <a:latin typeface="Segoe UI"/>
                         </a:rPr>
-                        <a:t>Fleet Bound Premium: $114,948.86</a:t>
+                        <a:t>Fleet Bound Premium: $114,777.68</a:t>
                       </a:r>
                     </a:p>
                   </a:txBody>
@@ -3727,7 +3727,7 @@
                         <a:rPr sz="900">
                           <a:latin typeface="Segoe UI"/>
                         </a:rPr>
-                        <a:t>Fleet Book %: 10.6%</a:t>
+                        <a:t>Fleet Book %: 10.5%</a:t>
                       </a:r>
                     </a:p>
                   </a:txBody>
@@ -3766,7 +3766,7 @@
                         <a:rPr sz="900">
                           <a:latin typeface="Segoe UI"/>
                         </a:rPr>
-                        <a:t>Non-Fleet Subs: 477  |  Binds: 50</a:t>
+                        <a:t>Non-Fleet Subs: 477  |  Binds: 51</a:t>
                       </a:r>
                     </a:p>
                   </a:txBody>
@@ -3803,7 +3803,7 @@
                         <a:rPr sz="900">
                           <a:latin typeface="Segoe UI"/>
                         </a:rPr>
-                        <a:t>Non-Fleet Bound Premium: $973,934.23</a:t>
+                        <a:t>Non-Fleet Bound Premium: $974,299.43</a:t>
                       </a:r>
                     </a:p>
                   </a:txBody>
@@ -3840,7 +3840,7 @@
                         <a:rPr sz="900">
                           <a:latin typeface="Segoe UI"/>
                         </a:rPr>
-                        <a:t>Non-Fleet Book %: 89.4%</a:t>
+                        <a:t>Non-Fleet Book %: 89.5%</a:t>
                       </a:r>
                     </a:p>
                   </a:txBody>
@@ -4707,7 +4707,7 @@
                           </a:solidFill>
                           <a:latin typeface="Segoe UI"/>
                         </a:rPr>
-                        <a:t>21.7%</a:t>
+                        <a:t>23.3%</a:t>
                       </a:r>
                     </a:p>
                   </a:txBody>
@@ -4983,7 +4983,7 @@
                           </a:solidFill>
                           <a:latin typeface="Segoe UI"/>
                         </a:rPr>
-                        <a:t>13</a:t>
+                        <a:t>14</a:t>
                       </a:r>
                     </a:p>
                   </a:txBody>
@@ -5262,7 +5262,7 @@
                           </a:solidFill>
                           <a:latin typeface="Segoe UI"/>
                         </a:rPr>
-                        <a:t>$81.8K</a:t>
+                        <a:t>$82.0K</a:t>
                       </a:r>
                     </a:p>
                   </a:txBody>

--- a/generated/Tier 1 Broker Scorecards/Your Truck Shield LLC_Broker_Scorecard.pptx
+++ b/generated/Tier 1 Broker Scorecards/Your Truck Shield LLC_Broker_Scorecard.pptx
@@ -3394,7 +3394,7 @@
                         <a:rPr sz="900">
                           <a:latin typeface="Segoe UI"/>
                         </a:rPr>
-                        <a:t>Tier 1  |  10.58% / 15.00%</a:t>
+                        <a:t>Tier 1  |  10.36% / 15.00%</a:t>
                       </a:r>
                     </a:p>
                   </a:txBody>
@@ -3690,7 +3690,7 @@
                         <a:rPr sz="900">
                           <a:latin typeface="Segoe UI"/>
                         </a:rPr>
-                        <a:t>Fleet Bound Premium: $114,777.68</a:t>
+                        <a:t>Fleet Bound Premium: $116,337.03</a:t>
                       </a:r>
                     </a:p>
                   </a:txBody>
@@ -3727,7 +3727,7 @@
                         <a:rPr sz="900">
                           <a:latin typeface="Segoe UI"/>
                         </a:rPr>
-                        <a:t>Fleet Book %: 10.5%</a:t>
+                        <a:t>Fleet Book %: 10.7%</a:t>
                       </a:r>
                     </a:p>
                   </a:txBody>
@@ -3766,7 +3766,7 @@
                         <a:rPr sz="900">
                           <a:latin typeface="Segoe UI"/>
                         </a:rPr>
-                        <a:t>Non-Fleet Subs: 477  |  Binds: 51</a:t>
+                        <a:t>Non-Fleet Subs: 478  |  Binds: 50</a:t>
                       </a:r>
                     </a:p>
                   </a:txBody>
@@ -3803,7 +3803,7 @@
                         <a:rPr sz="900">
                           <a:latin typeface="Segoe UI"/>
                         </a:rPr>
-                        <a:t>Non-Fleet Bound Premium: $974,299.43</a:t>
+                        <a:t>Non-Fleet Bound Premium: $972,740.08</a:t>
                       </a:r>
                     </a:p>
                   </a:txBody>
@@ -3840,7 +3840,7 @@
                         <a:rPr sz="900">
                           <a:latin typeface="Segoe UI"/>
                         </a:rPr>
-                        <a:t>Non-Fleet Book %: 89.5%</a:t>
+                        <a:t>Non-Fleet Book %: 89.3%</a:t>
                       </a:r>
                     </a:p>
                   </a:txBody>
@@ -4428,7 +4428,7 @@
                           </a:solidFill>
                           <a:latin typeface="Segoe UI"/>
                         </a:rPr>
-                        <a:t>60</a:t>
+                        <a:t>62</a:t>
                       </a:r>
                     </a:p>
                   </a:txBody>
@@ -4707,7 +4707,7 @@
                           </a:solidFill>
                           <a:latin typeface="Segoe UI"/>
                         </a:rPr>
-                        <a:t>23.3%</a:t>
+                        <a:t>22.6%</a:t>
                       </a:r>
                     </a:p>
                   </a:txBody>

--- a/generated/Tier 1 Broker Scorecards/Your Truck Shield LLC_Broker_Scorecard.pptx
+++ b/generated/Tier 1 Broker Scorecards/Your Truck Shield LLC_Broker_Scorecard.pptx
@@ -3357,7 +3357,7 @@
                         <a:rPr sz="800">
                           <a:latin typeface="Segoe UI"/>
                         </a:rPr>
-                        <a:t>$2,306,596.93 / $2,627,130.04 / $1,089,077.11</a:t>
+                        <a:t>$2,306,596.93 / $2,623,287.04 / $1,085,234.11</a:t>
                       </a:r>
                     </a:p>
                   </a:txBody>
@@ -3394,7 +3394,7 @@
                         <a:rPr sz="900">
                           <a:latin typeface="Segoe UI"/>
                         </a:rPr>
-                        <a:t>Tier 1  |  10.36% / 15.00%</a:t>
+                        <a:t>Tier 1  |  10.34% / 15.00%</a:t>
                       </a:r>
                     </a:p>
                   </a:txBody>
@@ -3431,7 +3431,7 @@
                         <a:rPr sz="900">
                           <a:latin typeface="Segoe UI"/>
                         </a:rPr>
-                        <a:t>$3,229,235.70  (33.7% achieved)</a:t>
+                        <a:t>$3,229,235.70  (33.6% achieved)</a:t>
                       </a:r>
                     </a:p>
                   </a:txBody>
@@ -3690,7 +3690,7 @@
                         <a:rPr sz="900">
                           <a:latin typeface="Segoe UI"/>
                         </a:rPr>
-                        <a:t>Fleet Bound Premium: $116,337.03</a:t>
+                        <a:t>Fleet Bound Premium: $118,657.72</a:t>
                       </a:r>
                     </a:p>
                   </a:txBody>
@@ -3727,7 +3727,7 @@
                         <a:rPr sz="900">
                           <a:latin typeface="Segoe UI"/>
                         </a:rPr>
-                        <a:t>Fleet Book %: 10.7%</a:t>
+                        <a:t>Fleet Book %: 10.9%</a:t>
                       </a:r>
                     </a:p>
                   </a:txBody>
@@ -3766,7 +3766,7 @@
                         <a:rPr sz="900">
                           <a:latin typeface="Segoe UI"/>
                         </a:rPr>
-                        <a:t>Non-Fleet Subs: 478  |  Binds: 50</a:t>
+                        <a:t>Non-Fleet Subs: 479  |  Binds: 50</a:t>
                       </a:r>
                     </a:p>
                   </a:txBody>
@@ -3803,7 +3803,7 @@
                         <a:rPr sz="900">
                           <a:latin typeface="Segoe UI"/>
                         </a:rPr>
-                        <a:t>Non-Fleet Bound Premium: $972,740.08</a:t>
+                        <a:t>Non-Fleet Bound Premium: $966,576.39</a:t>
                       </a:r>
                     </a:p>
                   </a:txBody>
@@ -3840,7 +3840,7 @@
                         <a:rPr sz="900">
                           <a:latin typeface="Segoe UI"/>
                         </a:rPr>
-                        <a:t>Non-Fleet Book %: 89.3%</a:t>
+                        <a:t>Non-Fleet Book %: 89.1%</a:t>
                       </a:r>
                     </a:p>
                   </a:txBody>
@@ -4428,7 +4428,7 @@
                           </a:solidFill>
                           <a:latin typeface="Segoe UI"/>
                         </a:rPr>
-                        <a:t>62</a:t>
+                        <a:t>63</a:t>
                       </a:r>
                     </a:p>
                   </a:txBody>
@@ -4707,7 +4707,7 @@
                           </a:solidFill>
                           <a:latin typeface="Segoe UI"/>
                         </a:rPr>
-                        <a:t>22.6%</a:t>
+                        <a:t>22.2%</a:t>
                       </a:r>
                     </a:p>
                   </a:txBody>
@@ -5262,7 +5262,7 @@
                           </a:solidFill>
                           <a:latin typeface="Segoe UI"/>
                         </a:rPr>
-                        <a:t>$82.0K</a:t>
+                        <a:t>$78.1K</a:t>
                       </a:r>
                     </a:p>
                   </a:txBody>

--- a/generated/Tier 1 Broker Scorecards/Your Truck Shield LLC_Broker_Scorecard.pptx
+++ b/generated/Tier 1 Broker Scorecards/Your Truck Shield LLC_Broker_Scorecard.pptx
@@ -3394,7 +3394,7 @@
                         <a:rPr sz="900">
                           <a:latin typeface="Segoe UI"/>
                         </a:rPr>
-                        <a:t>Tier 1  |  10.34% / 15.00%</a:t>
+                        <a:t>Tier 1  |  10.54% / 15.00%</a:t>
                       </a:r>
                     </a:p>
                   </a:txBody>
@@ -3690,7 +3690,7 @@
                         <a:rPr sz="900">
                           <a:latin typeface="Segoe UI"/>
                         </a:rPr>
-                        <a:t>Fleet Bound Premium: $118,657.72</a:t>
+                        <a:t>Fleet Bound Premium: $116,293.93</a:t>
                       </a:r>
                     </a:p>
                   </a:txBody>
@@ -3727,7 +3727,7 @@
                         <a:rPr sz="900">
                           <a:latin typeface="Segoe UI"/>
                         </a:rPr>
-                        <a:t>Fleet Book %: 10.9%</a:t>
+                        <a:t>Fleet Book %: 10.7%</a:t>
                       </a:r>
                     </a:p>
                   </a:txBody>
@@ -3766,7 +3766,7 @@
                         <a:rPr sz="900">
                           <a:latin typeface="Segoe UI"/>
                         </a:rPr>
-                        <a:t>Non-Fleet Subs: 479  |  Binds: 50</a:t>
+                        <a:t>Non-Fleet Subs: 479  |  Binds: 51</a:t>
                       </a:r>
                     </a:p>
                   </a:txBody>
@@ -3803,7 +3803,7 @@
                         <a:rPr sz="900">
                           <a:latin typeface="Segoe UI"/>
                         </a:rPr>
-                        <a:t>Non-Fleet Bound Premium: $966,576.39</a:t>
+                        <a:t>Non-Fleet Bound Premium: $968,940.18</a:t>
                       </a:r>
                     </a:p>
                   </a:txBody>
@@ -3840,7 +3840,7 @@
                         <a:rPr sz="900">
                           <a:latin typeface="Segoe UI"/>
                         </a:rPr>
-                        <a:t>Non-Fleet Book %: 89.1%</a:t>
+                        <a:t>Non-Fleet Book %: 89.3%</a:t>
                       </a:r>
                     </a:p>
                   </a:txBody>
@@ -4428,7 +4428,7 @@
                           </a:solidFill>
                           <a:latin typeface="Segoe UI"/>
                         </a:rPr>
-                        <a:t>63</a:t>
+                        <a:t>64</a:t>
                       </a:r>
                     </a:p>
                   </a:txBody>
@@ -4707,7 +4707,7 @@
                           </a:solidFill>
                           <a:latin typeface="Segoe UI"/>
                         </a:rPr>
-                        <a:t>22.2%</a:t>
+                        <a:t>21.9%</a:t>
                       </a:r>
                     </a:p>
                   </a:txBody>

--- a/generated/Tier 1 Broker Scorecards/Your Truck Shield LLC_Broker_Scorecard.pptx
+++ b/generated/Tier 1 Broker Scorecards/Your Truck Shield LLC_Broker_Scorecard.pptx
@@ -3690,7 +3690,7 @@
                         <a:rPr sz="900">
                           <a:latin typeface="Segoe UI"/>
                         </a:rPr>
-                        <a:t>Fleet Bound Premium: $116,293.93</a:t>
+                        <a:t>Fleet Bound Premium: $116,165.26</a:t>
                       </a:r>
                     </a:p>
                   </a:txBody>
@@ -3803,7 +3803,7 @@
                         <a:rPr sz="900">
                           <a:latin typeface="Segoe UI"/>
                         </a:rPr>
-                        <a:t>Non-Fleet Bound Premium: $968,940.18</a:t>
+                        <a:t>Non-Fleet Bound Premium: $969,068.85</a:t>
                       </a:r>
                     </a:p>
                   </a:txBody>

--- a/generated/Tier 1 Broker Scorecards/Your Truck Shield LLC_Broker_Scorecard.pptx
+++ b/generated/Tier 1 Broker Scorecards/Your Truck Shield LLC_Broker_Scorecard.pptx
@@ -3357,7 +3357,7 @@
                         <a:rPr sz="800">
                           <a:latin typeface="Segoe UI"/>
                         </a:rPr>
-                        <a:t>$2,306,596.93 / $2,623,287.04 / $1,085,234.11</a:t>
+                        <a:t>$2,306,596.93 / $2,446,036.12 / $1,085,234.11</a:t>
                       </a:r>
                     </a:p>
                   </a:txBody>
@@ -3690,7 +3690,7 @@
                         <a:rPr sz="900">
                           <a:latin typeface="Segoe UI"/>
                         </a:rPr>
-                        <a:t>Fleet Bound Premium: $116,165.26</a:t>
+                        <a:t>Fleet Bound Premium: $116,113.49</a:t>
                       </a:r>
                     </a:p>
                   </a:txBody>
@@ -3803,7 +3803,7 @@
                         <a:rPr sz="900">
                           <a:latin typeface="Segoe UI"/>
                         </a:rPr>
-                        <a:t>Non-Fleet Bound Premium: $969,068.85</a:t>
+                        <a:t>Non-Fleet Bound Premium: $969,120.62</a:t>
                       </a:r>
                     </a:p>
                   </a:txBody>
